--- a/pathsense_ppt.pptx
+++ b/pathsense_ppt.pptx
@@ -3362,7 +3362,7 @@
               </a:defRPr>
             </a:pPr>
             <a:r>
-              <a:t>Emergency Stops:  5.00</a:t>
+              <a:t>Emergency Stops:  0.00</a:t>
             </a:r>
           </a:p>
         </p:txBody>
@@ -3397,7 +3397,7 @@
               </a:defRPr>
             </a:pPr>
             <a:r>
-              <a:t>Path Efficiency:  85.24%</a:t>
+              <a:t>Path Efficiency:  80.60%</a:t>
             </a:r>
           </a:p>
         </p:txBody>
@@ -3882,7 +3882,7 @@
               </a:defRPr>
             </a:pPr>
             <a:r>
-              <a:t>Max Hold Speed Mps:  0.48</a:t>
+              <a:t>Max Hold Speed Mps:  0.14</a:t>
             </a:r>
           </a:p>
         </p:txBody>
@@ -3917,7 +3917,7 @@
               </a:defRPr>
             </a:pPr>
             <a:r>
-              <a:t>Post Siren Progress M:  14.35</a:t>
+              <a:t>Post Siren Progress M:  17.20</a:t>
             </a:r>
           </a:p>
         </p:txBody>
@@ -3952,7 +3952,7 @@
               </a:defRPr>
             </a:pPr>
             <a:r>
-              <a:t>Emergency Stops:  2.00</a:t>
+              <a:t>Emergency Stops:  0.00</a:t>
             </a:r>
           </a:p>
         </p:txBody>
@@ -5593,7 +5593,7 @@
                         <a:defRPr sz="1300" b="0"/>
                       </a:pPr>
                       <a:r>
-                        <a:t>99.71%</a:t>
+                        <a:t>99.53%</a:t>
                       </a:r>
                     </a:p>
                   </a:txBody>
@@ -5608,7 +5608,7 @@
                         <a:defRPr sz="1300" b="0"/>
                       </a:pPr>
                       <a:r>
-                        <a:t>0.49</a:t>
+                        <a:t>0.38</a:t>
                       </a:r>
                     </a:p>
                   </a:txBody>
@@ -5638,7 +5638,7 @@
                         <a:defRPr sz="1300" b="0"/>
                       </a:pPr>
                       <a:r>
-                        <a:t>4.67</a:t>
+                        <a:t>4.84</a:t>
                       </a:r>
                     </a:p>
                   </a:txBody>
@@ -5689,7 +5689,7 @@
                         <a:defRPr sz="1300" b="0"/>
                       </a:pPr>
                       <a:r>
-                        <a:t>85.24%</a:t>
+                        <a:t>80.60%</a:t>
                       </a:r>
                     </a:p>
                   </a:txBody>
@@ -5704,7 +5704,7 @@
                         <a:defRPr sz="1300" b="0"/>
                       </a:pPr>
                       <a:r>
-                        <a:t>1.20</a:t>
+                        <a:t>1.51</a:t>
                       </a:r>
                     </a:p>
                   </a:txBody>
@@ -5719,7 +5719,7 @@
                         <a:defRPr sz="1300" b="0"/>
                       </a:pPr>
                       <a:r>
-                        <a:t>5.00</a:t>
+                        <a:t>0.00</a:t>
                       </a:r>
                     </a:p>
                   </a:txBody>
@@ -5734,7 +5734,7 @@
                         <a:defRPr sz="1300" b="0"/>
                       </a:pPr>
                       <a:r>
-                        <a:t>0.81</a:t>
+                        <a:t>0.88</a:t>
                       </a:r>
                     </a:p>
                   </a:txBody>
@@ -5881,7 +5881,7 @@
                         <a:defRPr sz="1300" b="0"/>
                       </a:pPr>
                       <a:r>
-                        <a:t>95.30%</a:t>
+                        <a:t>97.47%</a:t>
                       </a:r>
                     </a:p>
                   </a:txBody>
@@ -5896,7 +5896,7 @@
                         <a:defRPr sz="1300" b="0"/>
                       </a:pPr>
                       <a:r>
-                        <a:t>0.86</a:t>
+                        <a:t>0.37</a:t>
                       </a:r>
                     </a:p>
                   </a:txBody>
@@ -5911,7 +5911,7 @@
                         <a:defRPr sz="1300" b="0"/>
                       </a:pPr>
                       <a:r>
-                        <a:t>2.00</a:t>
+                        <a:t>0.00</a:t>
                       </a:r>
                     </a:p>
                   </a:txBody>
@@ -5926,7 +5926,7 @@
                         <a:defRPr sz="1300" b="0"/>
                       </a:pPr>
                       <a:r>
-                        <a:t>0.86</a:t>
+                        <a:t>0.93</a:t>
                       </a:r>
                     </a:p>
                   </a:txBody>
@@ -6972,7 +6972,7 @@
               </a:defRPr>
             </a:pPr>
             <a:r>
-              <a:t>Path Efficiency:  99.71%</a:t>
+              <a:t>Path Efficiency:  99.53%</a:t>
             </a:r>
           </a:p>
         </p:txBody>
@@ -7007,7 +7007,7 @@
               </a:defRPr>
             </a:pPr>
             <a:r>
-              <a:t>Min Clearance M:  0.49</a:t>
+              <a:t>Min Clearance M:  0.38</a:t>
             </a:r>
           </a:p>
         </p:txBody>

--- a/pathsense_ppt.pptx
+++ b/pathsense_ppt.pptx
@@ -19,6 +19,7 @@
     <p:sldId id="267" r:id="rId18"/>
     <p:sldId id="268" r:id="rId19"/>
     <p:sldId id="269" r:id="rId20"/>
+    <p:sldId id="270" r:id="rId21"/>
   </p:sldIdLst>
   <p:sldSz cx="12191695" cy="6858000" type="screen4x3"/>
   <p:notesSz cx="6858000" cy="9144000"/>
@@ -4048,21 +4049,45 @@
               </a:defRPr>
             </a:pPr>
             <a:r>
-              <a:t>Honest Limitations</a:t>
-            </a:r>
-          </a:p>
-        </p:txBody>
-      </p:sp>
-      <p:sp>
-        <p:nvSpPr>
-          <p:cNvPr id="3" name="TextBox 2"/>
+              <a:t>Free World</a:t>
+            </a:r>
+          </a:p>
+        </p:txBody>
+      </p:sp>
+      <p:pic>
+        <p:nvPicPr>
+          <p:cNvPr id="3" name="Picture 2" descr="scenario_free_world.png"/>
+          <p:cNvPicPr>
+            <a:picLocks noChangeAspect="1"/>
+          </p:cNvPicPr>
+          <p:nvPr/>
+        </p:nvPicPr>
+        <p:blipFill>
+          <a:blip r:embed="rId2"/>
+          <a:stretch>
+            <a:fillRect/>
+          </a:stretch>
+        </p:blipFill>
+        <p:spPr>
+          <a:xfrm>
+            <a:off x="548640" y="1371600"/>
+            <a:ext cx="6766560" cy="5413248"/>
+          </a:xfrm>
+          <a:prstGeom prst="rect">
+            <a:avLst/>
+          </a:prstGeom>
+        </p:spPr>
+      </p:pic>
+      <p:sp>
+        <p:nvSpPr>
+          <p:cNvPr id="4" name="TextBox 3"/>
           <p:cNvSpPr txBox="1"/>
           <p:nvPr/>
         </p:nvSpPr>
         <p:spPr>
           <a:xfrm>
-            <a:off x="731520" y="1645920"/>
-            <a:ext cx="10698480" cy="3657600"/>
+            <a:off x="7589520" y="1371600"/>
+            <a:ext cx="4023360" cy="1097280"/>
           </a:xfrm>
           <a:prstGeom prst="rect">
             <a:avLst/>
@@ -4076,84 +4101,161 @@
           <a:lstStyle/>
           <a:p>
             <a:pPr>
-              <a:spcAft>
-                <a:spcPts val="800"/>
-              </a:spcAft>
-              <a:defRPr sz="1900">
+              <a:defRPr sz="1400" i="1">
                 <a:solidFill>
                   <a:srgbClr val="263238"/>
                 </a:solidFill>
               </a:defRPr>
             </a:pPr>
             <a:r>
-              <a:t>• Vision pipeline uses a synthetic camera model - no trained detector weights yet; detection is geometry-driven.</a:t>
-            </a:r>
-          </a:p>
-          <a:p>
-            <a:pPr>
-              <a:spcAft>
-                <a:spcPts val="800"/>
-              </a:spcAft>
-              <a:defRPr sz="1900">
+              <a:t>Open-world mode: a seeded RNG spawns random animals, pedestrians, wrong-side bikes and carts - all handled safely, 8/8 seeds pass.</a:t>
+            </a:r>
+          </a:p>
+        </p:txBody>
+      </p:sp>
+      <p:sp>
+        <p:nvSpPr>
+          <p:cNvPr id="5" name="TextBox 4"/>
+          <p:cNvSpPr txBox="1"/>
+          <p:nvPr/>
+        </p:nvSpPr>
+        <p:spPr>
+          <a:xfrm>
+            <a:off x="7589520" y="2651760"/>
+            <a:ext cx="4023360" cy="457200"/>
+          </a:xfrm>
+          <a:prstGeom prst="rect">
+            <a:avLst/>
+          </a:prstGeom>
+          <a:noFill/>
+        </p:spPr>
+        <p:txBody>
+          <a:bodyPr wrap="none">
+            <a:spAutoFit/>
+          </a:bodyPr>
+          <a:lstStyle/>
+          <a:p>
+            <a:pPr>
+              <a:defRPr sz="1600" b="1">
+                <a:solidFill>
+                  <a:srgbClr val="1B5E20"/>
+                </a:solidFill>
+              </a:defRPr>
+            </a:pPr>
+            <a:r>
+              <a:t>Status: PASS</a:t>
+            </a:r>
+          </a:p>
+        </p:txBody>
+      </p:sp>
+      <p:sp>
+        <p:nvSpPr>
+          <p:cNvPr id="6" name="TextBox 5"/>
+          <p:cNvSpPr txBox="1"/>
+          <p:nvPr/>
+        </p:nvSpPr>
+        <p:spPr>
+          <a:xfrm>
+            <a:off x="7589520" y="3291840"/>
+            <a:ext cx="4023360" cy="411480"/>
+          </a:xfrm>
+          <a:prstGeom prst="rect">
+            <a:avLst/>
+          </a:prstGeom>
+          <a:noFill/>
+        </p:spPr>
+        <p:txBody>
+          <a:bodyPr wrap="none">
+            <a:spAutoFit/>
+          </a:bodyPr>
+          <a:lstStyle/>
+          <a:p>
+            <a:pPr>
+              <a:defRPr sz="1400">
                 <a:solidFill>
                   <a:srgbClr val="263238"/>
                 </a:solidFill>
               </a:defRPr>
             </a:pPr>
             <a:r>
-              <a:t>• Acoustic module runs on synthetic event injection, not live mic hardware.</a:t>
-            </a:r>
-          </a:p>
-          <a:p>
-            <a:pPr>
-              <a:spcAft>
-                <a:spcPts val="800"/>
-              </a:spcAft>
-              <a:defRPr sz="1900">
+              <a:t>Min Clearance M:  1.50</a:t>
+            </a:r>
+          </a:p>
+        </p:txBody>
+      </p:sp>
+      <p:sp>
+        <p:nvSpPr>
+          <p:cNvPr id="7" name="TextBox 6"/>
+          <p:cNvSpPr txBox="1"/>
+          <p:nvPr/>
+        </p:nvSpPr>
+        <p:spPr>
+          <a:xfrm>
+            <a:off x="7589520" y="3749040"/>
+            <a:ext cx="4023360" cy="411480"/>
+          </a:xfrm>
+          <a:prstGeom prst="rect">
+            <a:avLst/>
+          </a:prstGeom>
+          <a:noFill/>
+        </p:spPr>
+        <p:txBody>
+          <a:bodyPr wrap="none">
+            <a:spAutoFit/>
+          </a:bodyPr>
+          <a:lstStyle/>
+          <a:p>
+            <a:pPr>
+              <a:defRPr sz="1400">
                 <a:solidFill>
                   <a:srgbClr val="263238"/>
                 </a:solidFill>
               </a:defRPr>
             </a:pPr>
             <a:r>
-              <a:t>• City-roads scenario needs 5 emergency stops - comfort tuning is open.</a:t>
-            </a:r>
-          </a:p>
-          <a:p>
-            <a:pPr>
-              <a:spcAft>
-                <a:spcPts val="800"/>
-              </a:spcAft>
-              <a:defRPr sz="1900">
+              <a:t>Emergency Stops:  0.00</a:t>
+            </a:r>
+          </a:p>
+        </p:txBody>
+      </p:sp>
+      <p:sp>
+        <p:nvSpPr>
+          <p:cNvPr id="8" name="TextBox 7"/>
+          <p:cNvSpPr txBox="1"/>
+          <p:nvPr/>
+        </p:nvSpPr>
+        <p:spPr>
+          <a:xfrm>
+            <a:off x="7589520" y="4206240"/>
+            <a:ext cx="4023360" cy="411480"/>
+          </a:xfrm>
+          <a:prstGeom prst="rect">
+            <a:avLst/>
+          </a:prstGeom>
+          <a:noFill/>
+        </p:spPr>
+        <p:txBody>
+          <a:bodyPr wrap="none">
+            <a:spAutoFit/>
+          </a:bodyPr>
+          <a:lstStyle/>
+          <a:p>
+            <a:pPr>
+              <a:defRPr sz="1400">
                 <a:solidFill>
                   <a:srgbClr val="263238"/>
                 </a:solidFill>
               </a:defRPr>
             </a:pPr>
             <a:r>
-              <a:t>• Single ego vehicle; no multi-agent negotiation yet.</a:t>
-            </a:r>
-          </a:p>
-          <a:p>
-            <a:pPr>
-              <a:spcAft>
-                <a:spcPts val="800"/>
-              </a:spcAft>
-              <a:defRPr sz="1900">
-                <a:solidFill>
-                  <a:srgbClr val="263238"/>
-                </a:solidFill>
-              </a:defRPr>
-            </a:pPr>
-            <a:r>
-              <a:t>• Simulation-first: hardware port is a stretch goal.</a:t>
-            </a:r>
-          </a:p>
-        </p:txBody>
-      </p:sp>
-      <p:sp>
-        <p:nvSpPr>
-          <p:cNvPr id="4" name="TextBox 3"/>
+              <a:t>Random Events:  3.00</a:t>
+            </a:r>
+          </a:p>
+        </p:txBody>
+      </p:sp>
+      <p:sp>
+        <p:nvSpPr>
+          <p:cNvPr id="9" name="TextBox 8"/>
           <p:cNvSpPr txBox="1"/>
           <p:nvPr/>
         </p:nvSpPr>
@@ -4195,6 +4297,215 @@
 </file>
 
 <file path=ppt/slides/slide14.xml><?xml version="1.0" encoding="utf-8"?>
+<p:sld xmlns:a="http://schemas.openxmlformats.org/drawingml/2006/main" xmlns:p="http://schemas.openxmlformats.org/presentationml/2006/main" xmlns:r="http://schemas.openxmlformats.org/officeDocument/2006/relationships">
+  <p:cSld>
+    <p:bg>
+      <p:bgPr>
+        <a:solidFill>
+          <a:srgbClr val="FFFFFF"/>
+        </a:solidFill>
+        <a:effectLst/>
+      </p:bgPr>
+    </p:bg>
+    <p:spTree>
+      <p:nvGrpSpPr>
+        <p:cNvPr id="1" name=""/>
+        <p:cNvGrpSpPr/>
+        <p:nvPr/>
+      </p:nvGrpSpPr>
+      <p:grpSpPr/>
+      <p:sp>
+        <p:nvSpPr>
+          <p:cNvPr id="2" name="TextBox 1"/>
+          <p:cNvSpPr txBox="1"/>
+          <p:nvPr/>
+        </p:nvSpPr>
+        <p:spPr>
+          <a:xfrm>
+            <a:off x="548640" y="320040"/>
+            <a:ext cx="11094415" cy="914400"/>
+          </a:xfrm>
+          <a:prstGeom prst="rect">
+            <a:avLst/>
+          </a:prstGeom>
+          <a:noFill/>
+        </p:spPr>
+        <p:txBody>
+          <a:bodyPr wrap="square">
+            <a:spAutoFit/>
+          </a:bodyPr>
+          <a:lstStyle/>
+          <a:p>
+            <a:pPr>
+              <a:defRPr sz="3200" b="1">
+                <a:solidFill>
+                  <a:srgbClr val="0D47A1"/>
+                </a:solidFill>
+              </a:defRPr>
+            </a:pPr>
+            <a:r>
+              <a:t>Honest Limitations</a:t>
+            </a:r>
+          </a:p>
+        </p:txBody>
+      </p:sp>
+      <p:sp>
+        <p:nvSpPr>
+          <p:cNvPr id="3" name="TextBox 2"/>
+          <p:cNvSpPr txBox="1"/>
+          <p:nvPr/>
+        </p:nvSpPr>
+        <p:spPr>
+          <a:xfrm>
+            <a:off x="731520" y="1645920"/>
+            <a:ext cx="10698480" cy="3657600"/>
+          </a:xfrm>
+          <a:prstGeom prst="rect">
+            <a:avLst/>
+          </a:prstGeom>
+          <a:noFill/>
+        </p:spPr>
+        <p:txBody>
+          <a:bodyPr wrap="square">
+            <a:spAutoFit/>
+          </a:bodyPr>
+          <a:lstStyle/>
+          <a:p>
+            <a:pPr>
+              <a:spcAft>
+                <a:spcPts val="800"/>
+              </a:spcAft>
+              <a:defRPr sz="1900">
+                <a:solidFill>
+                  <a:srgbClr val="263238"/>
+                </a:solidFill>
+              </a:defRPr>
+            </a:pPr>
+            <a:r>
+              <a:t>• Free world is seeded-random (reproducible), not adversarial online; event density is fixed per run.</a:t>
+            </a:r>
+          </a:p>
+          <a:p>
+            <a:pPr>
+              <a:spcAft>
+                <a:spcPts val="800"/>
+              </a:spcAft>
+              <a:defRPr sz="1900">
+                <a:solidFill>
+                  <a:srgbClr val="263238"/>
+                </a:solidFill>
+              </a:defRPr>
+            </a:pPr>
+            <a:r>
+              <a:t>• Vision pipeline uses a synthetic camera model - no trained detector weights yet; detection is geometry-driven.</a:t>
+            </a:r>
+          </a:p>
+          <a:p>
+            <a:pPr>
+              <a:spcAft>
+                <a:spcPts val="800"/>
+              </a:spcAft>
+              <a:defRPr sz="1900">
+                <a:solidFill>
+                  <a:srgbClr val="263238"/>
+                </a:solidFill>
+              </a:defRPr>
+            </a:pPr>
+            <a:r>
+              <a:t>• Acoustic module runs on synthetic event injection, not live mic hardware.</a:t>
+            </a:r>
+          </a:p>
+          <a:p>
+            <a:pPr>
+              <a:spcAft>
+                <a:spcPts val="800"/>
+              </a:spcAft>
+              <a:defRPr sz="1900">
+                <a:solidFill>
+                  <a:srgbClr val="263238"/>
+                </a:solidFill>
+              </a:defRPr>
+            </a:pPr>
+            <a:r>
+              <a:t>• City-roads scenario needs 5 emergency stops - comfort tuning is open.</a:t>
+            </a:r>
+          </a:p>
+          <a:p>
+            <a:pPr>
+              <a:spcAft>
+                <a:spcPts val="800"/>
+              </a:spcAft>
+              <a:defRPr sz="1900">
+                <a:solidFill>
+                  <a:srgbClr val="263238"/>
+                </a:solidFill>
+              </a:defRPr>
+            </a:pPr>
+            <a:r>
+              <a:t>• Single ego vehicle; no multi-agent negotiation yet.</a:t>
+            </a:r>
+          </a:p>
+          <a:p>
+            <a:pPr>
+              <a:spcAft>
+                <a:spcPts val="800"/>
+              </a:spcAft>
+              <a:defRPr sz="1900">
+                <a:solidFill>
+                  <a:srgbClr val="263238"/>
+                </a:solidFill>
+              </a:defRPr>
+            </a:pPr>
+            <a:r>
+              <a:t>• Simulation-first: hardware port is a stretch goal.</a:t>
+            </a:r>
+          </a:p>
+        </p:txBody>
+      </p:sp>
+      <p:sp>
+        <p:nvSpPr>
+          <p:cNvPr id="4" name="TextBox 3"/>
+          <p:cNvSpPr txBox="1"/>
+          <p:nvPr/>
+        </p:nvSpPr>
+        <p:spPr>
+          <a:xfrm>
+            <a:off x="548640" y="6355080"/>
+            <a:ext cx="11094415" cy="365760"/>
+          </a:xfrm>
+          <a:prstGeom prst="rect">
+            <a:avLst/>
+          </a:prstGeom>
+          <a:noFill/>
+        </p:spPr>
+        <p:txBody>
+          <a:bodyPr wrap="none">
+            <a:spAutoFit/>
+          </a:bodyPr>
+          <a:lstStyle/>
+          <a:p>
+            <a:pPr>
+              <a:defRPr sz="1100">
+                <a:solidFill>
+                  <a:srgbClr val="90A4AE"/>
+                </a:solidFill>
+              </a:defRPr>
+            </a:pPr>
+            <a:r>
+              <a:t>PathSense · SIH26037</a:t>
+            </a:r>
+          </a:p>
+        </p:txBody>
+      </p:sp>
+    </p:spTree>
+  </p:cSld>
+  <p:clrMapOvr>
+    <a:masterClrMapping/>
+  </p:clrMapOvr>
+</p:sld>
+</file>
+
+<file path=ppt/slides/slide15.xml><?xml version="1.0" encoding="utf-8"?>
 <p:sld xmlns:a="http://schemas.openxmlformats.org/drawingml/2006/main" xmlns:p="http://schemas.openxmlformats.org/presentationml/2006/main" xmlns:r="http://schemas.openxmlformats.org/officeDocument/2006/relationships">
   <p:cSld>
     <p:bg>
@@ -5138,7 +5449,7 @@
               </a:defRPr>
             </a:pPr>
             <a:r>
-              <a:t>Results: 7 / 7 Scenarios PASS, Zero Collisions</a:t>
+              <a:t>Results: 8 / 8 Scenarios PASS, Zero Collisions</a:t>
             </a:r>
           </a:p>
         </p:txBody>
@@ -5153,7 +5464,7 @@
         </p:nvGraphicFramePr>
         <p:xfrm>
           <a:off x="548640" y="1463040"/>
-          <a:ext cx="11064240" cy="3657600"/>
+          <a:ext cx="11064240" cy="4114800"/>
         </p:xfrm>
         <a:graphic>
           <a:graphicData uri="http://schemas.openxmlformats.org/drawingml/2006/table">
@@ -5933,6 +6244,102 @@
                   <a:tcPr/>
                 </a:tc>
               </a:tr>
+              <a:tr h="457200">
+                <a:tc>
+                  <a:txBody>
+                    <a:bodyPr/>
+                    <a:lstStyle/>
+                    <a:p>
+                      <a:pPr>
+                        <a:defRPr sz="1300" b="0"/>
+                      </a:pPr>
+                      <a:r>
+                        <a:t>Free World</a:t>
+                      </a:r>
+                    </a:p>
+                  </a:txBody>
+                  <a:tcPr/>
+                </a:tc>
+                <a:tc>
+                  <a:txBody>
+                    <a:bodyPr/>
+                    <a:lstStyle/>
+                    <a:p>
+                      <a:pPr>
+                        <a:defRPr sz="1300" b="1">
+                          <a:solidFill>
+                            <a:srgbClr val="1B5E20"/>
+                          </a:solidFill>
+                        </a:defRPr>
+                      </a:pPr>
+                      <a:r>
+                        <a:t>PASS</a:t>
+                      </a:r>
+                    </a:p>
+                  </a:txBody>
+                  <a:tcPr/>
+                </a:tc>
+                <a:tc>
+                  <a:txBody>
+                    <a:bodyPr/>
+                    <a:lstStyle/>
+                    <a:p>
+                      <a:pPr>
+                        <a:defRPr sz="1300" b="0"/>
+                      </a:pPr>
+                      <a:r>
+                        <a:t>79.34%</a:t>
+                      </a:r>
+                    </a:p>
+                  </a:txBody>
+                  <a:tcPr/>
+                </a:tc>
+                <a:tc>
+                  <a:txBody>
+                    <a:bodyPr/>
+                    <a:lstStyle/>
+                    <a:p>
+                      <a:pPr>
+                        <a:defRPr sz="1300" b="0"/>
+                      </a:pPr>
+                      <a:r>
+                        <a:t>1.50</a:t>
+                      </a:r>
+                    </a:p>
+                  </a:txBody>
+                  <a:tcPr/>
+                </a:tc>
+                <a:tc>
+                  <a:txBody>
+                    <a:bodyPr/>
+                    <a:lstStyle/>
+                    <a:p>
+                      <a:pPr>
+                        <a:defRPr sz="1300" b="0"/>
+                      </a:pPr>
+                      <a:r>
+                        <a:t>0.00</a:t>
+                      </a:r>
+                    </a:p>
+                  </a:txBody>
+                  <a:tcPr/>
+                </a:tc>
+                <a:tc>
+                  <a:txBody>
+                    <a:bodyPr/>
+                    <a:lstStyle/>
+                    <a:p>
+                      <a:pPr>
+                        <a:defRPr sz="1300" b="0"/>
+                      </a:pPr>
+                      <a:r>
+                        <a:t>2.29</a:t>
+                      </a:r>
+                    </a:p>
+                  </a:txBody>
+                  <a:tcPr/>
+                </a:tc>
+              </a:tr>
             </a:tbl>
           </a:graphicData>
         </a:graphic>
